--- a/Модуль 1/Unity Модуль 1 Урок 3. Умовні оператори + тернарка.pptx
+++ b/Модуль 1/Unity Модуль 1 Урок 3. Умовні оператори + тернарка.pptx
@@ -219,7 +219,7 @@
           <a:p>
             <a:fld id="{7B418C3B-5615-4532-8AB6-D80322BC11BA}" type="datetimeFigureOut">
               <a:rPr lang="uk-UA" smtClean="0"/>
-              <a:t>27.07.2025</a:t>
+              <a:t>04.09.2025</a:t>
             </a:fld>
             <a:endParaRPr lang="uk-UA"/>
           </a:p>
@@ -636,7 +636,7 @@
           <a:p>
             <a:fld id="{E461E9BA-8501-4193-BA88-839E340A9D5A}" type="datetimeFigureOut">
               <a:rPr lang="uk-UA" smtClean="0"/>
-              <a:t>27.07.2025</a:t>
+              <a:t>04.09.2025</a:t>
             </a:fld>
             <a:endParaRPr lang="uk-UA"/>
           </a:p>
@@ -836,7 +836,7 @@
           <a:p>
             <a:fld id="{E461E9BA-8501-4193-BA88-839E340A9D5A}" type="datetimeFigureOut">
               <a:rPr lang="uk-UA" smtClean="0"/>
-              <a:t>27.07.2025</a:t>
+              <a:t>04.09.2025</a:t>
             </a:fld>
             <a:endParaRPr lang="uk-UA"/>
           </a:p>
@@ -1046,7 +1046,7 @@
           <a:p>
             <a:fld id="{E461E9BA-8501-4193-BA88-839E340A9D5A}" type="datetimeFigureOut">
               <a:rPr lang="uk-UA" smtClean="0"/>
-              <a:t>27.07.2025</a:t>
+              <a:t>04.09.2025</a:t>
             </a:fld>
             <a:endParaRPr lang="uk-UA"/>
           </a:p>
@@ -1281,7 +1281,7 @@
           <a:p>
             <a:fld id="{E461E9BA-8501-4193-BA88-839E340A9D5A}" type="datetimeFigureOut">
               <a:rPr lang="uk-UA" smtClean="0"/>
-              <a:t>27.07.2025</a:t>
+              <a:t>04.09.2025</a:t>
             </a:fld>
             <a:endParaRPr lang="uk-UA"/>
           </a:p>
@@ -1557,7 +1557,7 @@
           <a:p>
             <a:fld id="{E461E9BA-8501-4193-BA88-839E340A9D5A}" type="datetimeFigureOut">
               <a:rPr lang="uk-UA" smtClean="0"/>
-              <a:t>27.07.2025</a:t>
+              <a:t>04.09.2025</a:t>
             </a:fld>
             <a:endParaRPr lang="uk-UA"/>
           </a:p>
@@ -1825,7 +1825,7 @@
           <a:p>
             <a:fld id="{E461E9BA-8501-4193-BA88-839E340A9D5A}" type="datetimeFigureOut">
               <a:rPr lang="uk-UA" smtClean="0"/>
-              <a:t>27.07.2025</a:t>
+              <a:t>04.09.2025</a:t>
             </a:fld>
             <a:endParaRPr lang="uk-UA"/>
           </a:p>
@@ -2240,7 +2240,7 @@
           <a:p>
             <a:fld id="{E461E9BA-8501-4193-BA88-839E340A9D5A}" type="datetimeFigureOut">
               <a:rPr lang="uk-UA" smtClean="0"/>
-              <a:t>27.07.2025</a:t>
+              <a:t>04.09.2025</a:t>
             </a:fld>
             <a:endParaRPr lang="uk-UA"/>
           </a:p>
@@ -2382,7 +2382,7 @@
           <a:p>
             <a:fld id="{E461E9BA-8501-4193-BA88-839E340A9D5A}" type="datetimeFigureOut">
               <a:rPr lang="uk-UA" smtClean="0"/>
-              <a:t>27.07.2025</a:t>
+              <a:t>04.09.2025</a:t>
             </a:fld>
             <a:endParaRPr lang="uk-UA"/>
           </a:p>
@@ -2495,7 +2495,7 @@
           <a:p>
             <a:fld id="{E461E9BA-8501-4193-BA88-839E340A9D5A}" type="datetimeFigureOut">
               <a:rPr lang="uk-UA" smtClean="0"/>
-              <a:t>27.07.2025</a:t>
+              <a:t>04.09.2025</a:t>
             </a:fld>
             <a:endParaRPr lang="uk-UA"/>
           </a:p>
@@ -2808,7 +2808,7 @@
           <a:p>
             <a:fld id="{E461E9BA-8501-4193-BA88-839E340A9D5A}" type="datetimeFigureOut">
               <a:rPr lang="uk-UA" smtClean="0"/>
-              <a:t>27.07.2025</a:t>
+              <a:t>04.09.2025</a:t>
             </a:fld>
             <a:endParaRPr lang="uk-UA"/>
           </a:p>
@@ -3097,7 +3097,7 @@
           <a:p>
             <a:fld id="{E461E9BA-8501-4193-BA88-839E340A9D5A}" type="datetimeFigureOut">
               <a:rPr lang="uk-UA" smtClean="0"/>
-              <a:t>27.07.2025</a:t>
+              <a:t>04.09.2025</a:t>
             </a:fld>
             <a:endParaRPr lang="uk-UA"/>
           </a:p>
@@ -3340,7 +3340,7 @@
           <a:p>
             <a:fld id="{E461E9BA-8501-4193-BA88-839E340A9D5A}" type="datetimeFigureOut">
               <a:rPr lang="uk-UA" smtClean="0"/>
-              <a:t>27.07.2025</a:t>
+              <a:t>04.09.2025</a:t>
             </a:fld>
             <a:endParaRPr lang="uk-UA"/>
           </a:p>
@@ -11796,6 +11796,16 @@
               <a:tabLst/>
             </a:pPr>
             <a:r>
+              <a:rPr lang="en-US" altLang="uk-UA" dirty="0">
+                <a:solidFill>
+                  <a:srgbClr val="CC7832"/>
+                </a:solidFill>
+                <a:latin typeface="Courier New" panose="02070309020205020404" pitchFamily="49" charset="0"/>
+                <a:cs typeface="Courier New" panose="02070309020205020404" pitchFamily="49" charset="0"/>
+              </a:rPr>
+              <a:t>s</a:t>
+            </a:r>
+            <a:r>
               <a:rPr kumimoji="0" lang="en-US" altLang="uk-UA" b="0" i="0" u="none" strike="noStrike" cap="none" normalizeH="0" baseline="0" dirty="0">
                 <a:ln>
                   <a:noFill/>
@@ -11807,7 +11817,7 @@
                 <a:latin typeface="Courier New" panose="02070309020205020404" pitchFamily="49" charset="0"/>
                 <a:cs typeface="Courier New" panose="02070309020205020404" pitchFamily="49" charset="0"/>
               </a:rPr>
-              <a:t>String</a:t>
+              <a:t>tring</a:t>
             </a:r>
             <a:r>
               <a:rPr kumimoji="0" lang="uk-UA" altLang="uk-UA" b="0" i="0" u="none" strike="noStrike" cap="none" normalizeH="0" baseline="0" dirty="0">
@@ -12972,46 +12982,17 @@
               </a:rPr>
             </a:br>
             <a:r>
-              <a:rPr kumimoji="0" lang="uk-UA" altLang="uk-UA" b="0" i="0" u="none" strike="noStrike" cap="none" normalizeH="0" baseline="0" dirty="0" err="1">
-                <a:ln>
-                  <a:noFill/>
-                </a:ln>
-                <a:solidFill>
-                  <a:srgbClr val="A9B7C6"/>
-                </a:solidFill>
-                <a:effectLst/>
-                <a:latin typeface="Courier New" panose="02070309020205020404" pitchFamily="49" charset="0"/>
-                <a:cs typeface="Courier New" panose="02070309020205020404" pitchFamily="49" charset="0"/>
-              </a:rPr>
-              <a:t>System.</a:t>
-            </a:r>
-            <a:r>
-              <a:rPr kumimoji="0" lang="uk-UA" altLang="uk-UA" b="0" i="1" u="none" strike="noStrike" cap="none" normalizeH="0" baseline="0" dirty="0" err="1">
-                <a:ln>
-                  <a:noFill/>
-                </a:ln>
-                <a:solidFill>
-                  <a:srgbClr val="9876AA"/>
-                </a:solidFill>
-                <a:effectLst/>
-                <a:latin typeface="Courier New" panose="02070309020205020404" pitchFamily="49" charset="0"/>
-                <a:cs typeface="Courier New" panose="02070309020205020404" pitchFamily="49" charset="0"/>
-              </a:rPr>
-              <a:t>out</a:t>
-            </a:r>
-            <a:r>
-              <a:rPr kumimoji="0" lang="uk-UA" altLang="uk-UA" b="0" i="0" u="none" strike="noStrike" cap="none" normalizeH="0" baseline="0" dirty="0" err="1">
-                <a:ln>
-                  <a:noFill/>
-                </a:ln>
-                <a:solidFill>
-                  <a:srgbClr val="A9B7C6"/>
-                </a:solidFill>
-                <a:effectLst/>
-                <a:latin typeface="Courier New" panose="02070309020205020404" pitchFamily="49" charset="0"/>
-                <a:cs typeface="Courier New" panose="02070309020205020404" pitchFamily="49" charset="0"/>
-              </a:rPr>
-              <a:t>.println</a:t>
+              <a:rPr lang="en-US" sz="1800" dirty="0" err="1">
+                <a:solidFill>
+                  <a:schemeClr val="accent2"/>
+                </a:solidFill>
+                <a:highlight>
+                  <a:srgbClr val="FFFFFF"/>
+                </a:highlight>
+                <a:latin typeface="Courier New" panose="02070309020205020404" pitchFamily="49" charset="0"/>
+                <a:cs typeface="Courier New" panose="02070309020205020404" pitchFamily="49" charset="0"/>
+              </a:rPr>
+              <a:t>Console.WriteLine</a:t>
             </a:r>
             <a:r>
               <a:rPr kumimoji="0" lang="uk-UA" altLang="uk-UA" b="0" i="0" u="none" strike="noStrike" cap="none" normalizeH="0" baseline="0" dirty="0">
